--- a/Livrables/3-cahier des charges.pptx
+++ b/Livrables/3-cahier des charges.pptx
@@ -168,7 +168,7 @@
       <p15:notesGuideLst xmlns:p15="http://schemas.microsoft.com/office/powerpoint/2012/main"/>
     </p:ext>
     <p:ext uri="GoogleSlidesCustomDataVersion2">
-      <go:slidesCustomData xmlns:go="http://customooxmlschemas.google.com/" xmlns:ahyp="http://schemas.microsoft.com/office/drawing/2018/hyperlinkcolor" xmlns:p15="http://schemas.microsoft.com/office/powerpoint/2012/main" xmlns:p14="http://schemas.microsoft.com/office/powerpoint/2010/main" xmlns:com="http://schemas.openxmlformats.org/drawingml/2006/compatibility" xmlns:pvml="urn:schemas-microsoft-com:office:powerpoint" xmlns:v="urn:schemas-microsoft-com:vml" xmlns:o="urn:schemas-microsoft-com:office:office" xmlns:dgm="http://schemas.openxmlformats.org/drawingml/2006/diagram" xmlns:c="http://schemas.openxmlformats.org/drawingml/2006/chart" xmlns:mv="urn:schemas-microsoft-com:mac:vml" xmlns:mc="http://schemas.openxmlformats.org/markup-compatibility/2006" xmlns="" r:id="rId36" roundtripDataSignature="AMtx7mjPQChcynK0uSiMmFn/cMlX7yPp1g=="/>
+      <go:slidesCustomData xmlns="" xmlns:mc="http://schemas.openxmlformats.org/markup-compatibility/2006" xmlns:mv="urn:schemas-microsoft-com:mac:vml" xmlns:c="http://schemas.openxmlformats.org/drawingml/2006/chart" xmlns:dgm="http://schemas.openxmlformats.org/drawingml/2006/diagram" xmlns:o="urn:schemas-microsoft-com:office:office" xmlns:v="urn:schemas-microsoft-com:vml" xmlns:pvml="urn:schemas-microsoft-com:office:powerpoint" xmlns:com="http://schemas.openxmlformats.org/drawingml/2006/compatibility" xmlns:p14="http://schemas.microsoft.com/office/powerpoint/2010/main" xmlns:p15="http://schemas.microsoft.com/office/powerpoint/2012/main" xmlns:ahyp="http://schemas.microsoft.com/office/drawing/2018/hyperlinkcolor" xmlns:go="http://customooxmlschemas.google.com/" r:id="rId36" roundtripDataSignature="AMtx7mjPQChcynK0uSiMmFn/cMlX7yPp1g=="/>
     </p:ext>
   </p:extLst>
 </p:presentation>
@@ -268,7 +268,7 @@
           <a:p>
             <a:fld id="{BEFFE713-0AEB-4B43-BF36-3015909EF70B}" type="datetimeFigureOut">
               <a:rPr lang="fr-FR" smtClean="0"/>
-              <a:t>20/09/2025</a:t>
+              <a:t>21/09/2025</a:t>
             </a:fld>
             <a:endParaRPr lang="fr-FR"/>
           </a:p>
@@ -11160,7 +11160,7 @@
         <p:spPr>
           <a:xfrm>
             <a:off x="464272" y="778792"/>
-            <a:ext cx="8018060" cy="4339650"/>
+            <a:ext cx="8018060" cy="4154984"/>
           </a:xfrm>
           <a:prstGeom prst="rect">
             <a:avLst/>
@@ -11190,13 +11190,8 @@
               <a:rPr lang="fr-FR" sz="1200" dirty="0">
                 <a:latin typeface="Montserrat" panose="00000500000000000000" pitchFamily="2" charset="0"/>
               </a:rPr>
-              <a:t>Temps de travail candidat : 70 h de formation/projet</a:t>
-            </a:r>
-          </a:p>
-          <a:p>
-            <a:endParaRPr lang="fr-FR" sz="1200" dirty="0">
-              <a:latin typeface="Montserrat" panose="00000500000000000000" pitchFamily="2" charset="0"/>
-            </a:endParaRPr>
+              <a:t>Temps de travail candidat : 70 h</a:t>
+            </a:r>
           </a:p>
           <a:p>
             <a:r>
@@ -11320,7 +11315,19 @@
               <a:rPr lang="fr-FR" sz="1200" dirty="0">
                 <a:latin typeface="Montserrat" panose="00000500000000000000" pitchFamily="2" charset="0"/>
               </a:rPr>
-              <a:t>Nom de domaine  personnalisé (dataexec.fr): </a:t>
+              <a:t>Nom de domaine (</a:t>
+            </a:r>
+            <a:r>
+              <a:rPr lang="fr-FR" sz="1200" dirty="0" err="1">
+                <a:latin typeface="Montserrat" panose="00000500000000000000" pitchFamily="2" charset="0"/>
+              </a:rPr>
+              <a:t>github</a:t>
+            </a:r>
+            <a:r>
+              <a:rPr lang="fr-FR" sz="1200" dirty="0">
+                <a:latin typeface="Montserrat" panose="00000500000000000000" pitchFamily="2" charset="0"/>
+              </a:rPr>
+              <a:t>): </a:t>
             </a:r>
           </a:p>
           <a:p>
@@ -11335,7 +11342,7 @@
                 </a:effectLst>
                 <a:latin typeface="Montserrat" panose="00000500000000000000" pitchFamily="2" charset="0"/>
               </a:rPr>
-              <a:t>15</a:t>
+              <a:t>0</a:t>
             </a:r>
             <a:r>
               <a:rPr lang="fr-FR" sz="1200" dirty="0">
@@ -11396,7 +11403,7 @@
               <a:t>Prix final estimatif : </a:t>
             </a:r>
             <a:r>
-              <a:rPr lang="fr-FR" sz="1200" b="1" dirty="0">
+              <a:rPr lang="fr-FR" sz="1200" b="1">
                 <a:effectLst>
                   <a:outerShdw blurRad="38100" dist="38100" dir="2700000" algn="tl">
                     <a:srgbClr val="000000">
@@ -11406,7 +11413,7 @@
                 </a:effectLst>
                 <a:latin typeface="Montserrat" panose="00000500000000000000" pitchFamily="2" charset="0"/>
               </a:rPr>
-              <a:t>4 215 </a:t>
+              <a:t>4 200 </a:t>
             </a:r>
             <a:r>
               <a:rPr lang="fr-FR" sz="1200" b="1" dirty="0">
